--- a/ET_AI_Hackathon_IKI.pptx
+++ b/ET_AI_Hackathon_IKI.pptx
@@ -1928,6 +1928,59 @@
         </p:nvSpPr>
         <p:spPr>
           <a:xfrm>
+            <a:off x="640080" y="5897880"/>
+            <a:ext cx="10972800" cy="274320"/>
+          </a:xfrm>
+          <a:prstGeom prst="rect">
+            <a:avLst/>
+          </a:prstGeom>
+          <a:noFill/>
+          <a:ln/>
+        </p:spPr>
+        <p:txBody>
+          <a:bodyPr wrap="square" lIns="0" tIns="0" rIns="0" bIns="0" rtlCol="0" anchor="ctr"/>
+          <a:lstStyle/>
+          <a:p>
+            <a:pPr indent="0" marL="0">
+              <a:buNone/>
+            </a:pPr>
+            <a:r>
+              <a:rPr lang="en-US" sz="1350" b="1" dirty="0">
+                <a:solidFill>
+                  <a:srgbClr val="E9EEF5"/>
+                </a:solidFill>
+                <a:latin typeface="Calibri" pitchFamily="34" charset="0"/>
+                <a:ea typeface="Calibri" pitchFamily="34" charset="-122"/>
+                <a:cs typeface="Calibri" pitchFamily="34" charset="-120"/>
+              </a:rPr>
+              <a:t>Team raghupatil9036</a:t>
+            </a:r>
+            <a:pPr indent="0" marL="0">
+              <a:buNone/>
+            </a:pPr>
+            <a:r>
+              <a:rPr lang="en-US" sz="1350" dirty="0">
+                <a:solidFill>
+                  <a:srgbClr val="97A4B3"/>
+                </a:solidFill>
+                <a:latin typeface="Calibri" pitchFamily="34" charset="0"/>
+                <a:ea typeface="Calibri" pitchFamily="34" charset="-122"/>
+                <a:cs typeface="Calibri" pitchFamily="34" charset="-120"/>
+              </a:rPr>
+              <a:t>   ·   Raghavendra S Patil   ·   Pallavi C</a:t>
+            </a:r>
+            <a:endParaRPr lang="en-US" sz="1350" dirty="0"/>
+          </a:p>
+        </p:txBody>
+      </p:sp>
+      <p:sp>
+        <p:nvSpPr>
+          <p:cNvPr id="9" name="Text 7"/>
+          <p:cNvSpPr/>
+          <p:nvPr/>
+        </p:nvSpPr>
+        <p:spPr>
+          <a:xfrm>
             <a:off x="640080" y="6217920"/>
             <a:ext cx="10972800" cy="274320"/>
           </a:xfrm>

--- a/ET_AI_Hackathon_IKI.pptx
+++ b/ET_AI_Hackathon_IKI.pptx
@@ -4202,7 +4202,7 @@
                 <a:ea typeface="Calibri" pitchFamily="34" charset="-122"/>
                 <a:cs typeface="Calibri" pitchFamily="34" charset="-120"/>
               </a:rPr>
-              <a:t>Reads any document, extracts entities, links them into a live graph</a:t>
+              <a:t>Reads PDF, spreadsheets &amp; email; extracts entities; links into a live graph</a:t>
             </a:r>
             <a:endParaRPr lang="en-US" sz="1250" dirty="0"/>
           </a:p>
@@ -5013,7 +5013,7 @@
                 <a:ea typeface="Calibri" pitchFamily="34" charset="-122"/>
                 <a:cs typeface="Calibri" pitchFamily="34" charset="-120"/>
               </a:rPr>
-              <a:t>Live upload · Asset 360 · audit exports · voice query · command palette</a:t>
+              <a:t>Multi-format ingest · grounded answers · audit trail · Asset 360 · voice · command palette</a:t>
             </a:r>
             <a:endParaRPr lang="en-US" sz="1250" dirty="0"/>
           </a:p>
@@ -5294,7 +5294,7 @@
                 <a:ea typeface="Calibri" pitchFamily="34" charset="-122"/>
                 <a:cs typeface="Calibri" pitchFamily="34" charset="-120"/>
               </a:rPr>
-              <a:t>PDF · scans · sheets</a:t>
+              <a:t>PDF · sheets · email</a:t>
             </a:r>
             <a:endParaRPr lang="en-US" sz="1100" dirty="0"/>
           </a:p>
@@ -7288,7 +7288,7 @@
                 <a:ea typeface="Calibri" pitchFamily="34" charset="-122"/>
                 <a:cs typeface="Calibri" pitchFamily="34" charset="-120"/>
               </a:rPr>
-              <a:t>Drop in a new document and it is entity-extracted, linked, and queryable instantly.</a:t>
+              <a:t>Drop in any format — PDF, spreadsheet or email — and it's entity-extracted, linked, and queryable instantly.</a:t>
             </a:r>
             <a:endParaRPr lang="en-US" sz="1250" dirty="0"/>
           </a:p>

--- a/ET_AI_Hackathon_IKI.pptx
+++ b/ET_AI_Hackathon_IKI.pptx
@@ -4202,7 +4202,7 @@
                 <a:ea typeface="Calibri" pitchFamily="34" charset="-122"/>
                 <a:cs typeface="Calibri" pitchFamily="34" charset="-120"/>
               </a:rPr>
-              <a:t>Reads PDF, spreadsheets &amp; email; extracts entities; links into a live graph</a:t>
+              <a:t>Reads PDF, spreadsheets, email &amp; scanned images (OCR); links into a live graph</a:t>
             </a:r>
             <a:endParaRPr lang="en-US" sz="1250" dirty="0"/>
           </a:p>
@@ -5294,7 +5294,7 @@
                 <a:ea typeface="Calibri" pitchFamily="34" charset="-122"/>
                 <a:cs typeface="Calibri" pitchFamily="34" charset="-120"/>
               </a:rPr>
-              <a:t>PDF · sheets · email</a:t>
+              <a:t>PDF · sheets · email · scans (OCR)</a:t>
             </a:r>
             <a:endParaRPr lang="en-US" sz="1100" dirty="0"/>
           </a:p>
@@ -7288,7 +7288,7 @@
                 <a:ea typeface="Calibri" pitchFamily="34" charset="-122"/>
                 <a:cs typeface="Calibri" pitchFamily="34" charset="-120"/>
               </a:rPr>
-              <a:t>Drop in any format — PDF, spreadsheet or email — and it's entity-extracted, linked, and queryable instantly.</a:t>
+              <a:t>Drop in any format — PDF, spreadsheet, email, even a scanned photo (OCR) — entity-extracted, linked, queryable instantly.</a:t>
             </a:r>
             <a:endParaRPr lang="en-US" sz="1250" dirty="0"/>
           </a:p>

--- a/ET_AI_Hackathon_IKI.pptx
+++ b/ET_AI_Hackathon_IKI.pptx
@@ -4202,7 +4202,7 @@
                 <a:ea typeface="Calibri" pitchFamily="34" charset="-122"/>
                 <a:cs typeface="Calibri" pitchFamily="34" charset="-120"/>
               </a:rPr>
-              <a:t>Reads PDF, spreadsheets, email &amp; scanned images (OCR); links into a live graph</a:t>
+              <a:t>Reads PDF, spreadsheets, email, scanned images &amp; P&amp;IDs (OCR + layout); links into a live graph</a:t>
             </a:r>
             <a:endParaRPr lang="en-US" sz="1250" dirty="0"/>
           </a:p>
@@ -4550,7 +4550,7 @@
                 <a:ea typeface="Calibri" pitchFamily="34" charset="-122"/>
                 <a:cs typeface="Calibri" pitchFamily="34" charset="-120"/>
               </a:rPr>
-              <a:t>Per-asset health, failure timeline, root cause &amp; predictive actions</a:t>
+              <a:t>Per-asset health, timeline &amp; root cause, fused with a live sensor feed</a:t>
             </a:r>
             <a:endParaRPr lang="en-US" sz="1250" dirty="0"/>
           </a:p>
@@ -4898,7 +4898,7 @@
                 <a:ea typeface="Calibri" pitchFamily="34" charset="-122"/>
                 <a:cs typeface="Calibri" pitchFamily="34" charset="-120"/>
               </a:rPr>
-              <a:t>Recurring failure patterns across the plant's whole history</a:t>
+              <a:t>Recurring failure patterns, matched to known industry failure modes</a:t>
             </a:r>
             <a:endParaRPr lang="en-US" sz="1250" dirty="0"/>
           </a:p>
